--- a/assets/ppt/lex/lex2-regular-expressions.pptx
+++ b/assets/ppt/lex/lex2-regular-expressions.pptx
@@ -2568,7 +2568,7 @@
           <a:p>
             <a:fld id="{1B6DC762-1116-2146-A47C-D79A5A5DBAFD}" type="datetime1">
               <a:rPr lang="en-CA" smtClean="0"/>
-              <a:t>2020-09-16</a:t>
+              <a:t>2025-06-02</a:t>
             </a:fld>
             <a:endParaRPr lang="en-US"/>
           </a:p>
@@ -2766,7 +2766,7 @@
           <a:p>
             <a:fld id="{725FEDD1-5A1B-2342-BAF0-F7C5511A73CE}" type="datetime1">
               <a:rPr lang="en-CA" smtClean="0"/>
-              <a:t>2020-09-16</a:t>
+              <a:t>2025-06-02</a:t>
             </a:fld>
             <a:endParaRPr lang="en-US"/>
           </a:p>
@@ -2974,7 +2974,7 @@
           <a:p>
             <a:fld id="{F09E59AE-0AE1-4048-8BD6-D39FC0EBB194}" type="datetime1">
               <a:rPr lang="en-CA" smtClean="0"/>
-              <a:t>2020-09-16</a:t>
+              <a:t>2025-06-02</a:t>
             </a:fld>
             <a:endParaRPr lang="en-US"/>
           </a:p>
@@ -3324,7 +3324,7 @@
           <a:p>
             <a:fld id="{A2849525-9B7D-5945-A782-775278635E42}" type="datetime1">
               <a:rPr lang="en-CA" smtClean="0"/>
-              <a:t>2020-09-16</a:t>
+              <a:t>2025-06-02</a:t>
             </a:fld>
             <a:endParaRPr lang="en-US"/>
           </a:p>
@@ -3599,7 +3599,7 @@
           <a:p>
             <a:fld id="{D05E1499-BDD1-6940-8C79-13A8B8E63D57}" type="datetime1">
               <a:rPr lang="en-CA" smtClean="0"/>
-              <a:t>2020-09-16</a:t>
+              <a:t>2025-06-02</a:t>
             </a:fld>
             <a:endParaRPr lang="en-US"/>
           </a:p>
@@ -3864,7 +3864,7 @@
           <a:p>
             <a:fld id="{17E70EF3-18A7-4644-8DA2-1EB9CA66C736}" type="datetime1">
               <a:rPr lang="en-CA" smtClean="0"/>
-              <a:t>2020-09-16</a:t>
+              <a:t>2025-06-02</a:t>
             </a:fld>
             <a:endParaRPr lang="en-US"/>
           </a:p>
@@ -4276,7 +4276,7 @@
           <a:p>
             <a:fld id="{54538FC1-2481-FB4A-91E5-87F3422DE2D5}" type="datetime1">
               <a:rPr lang="en-CA" smtClean="0"/>
-              <a:t>2020-09-16</a:t>
+              <a:t>2025-06-02</a:t>
             </a:fld>
             <a:endParaRPr lang="en-US"/>
           </a:p>
@@ -4417,7 +4417,7 @@
           <a:p>
             <a:fld id="{93D5C515-1622-C840-89B2-A4A55D34866A}" type="datetime1">
               <a:rPr lang="en-CA" smtClean="0"/>
-              <a:t>2020-09-16</a:t>
+              <a:t>2025-06-02</a:t>
             </a:fld>
             <a:endParaRPr lang="en-US"/>
           </a:p>
@@ -4530,7 +4530,7 @@
           <a:p>
             <a:fld id="{B9077E75-6C88-BB47-AC6F-0DCA859E7113}" type="datetime1">
               <a:rPr lang="en-CA" smtClean="0"/>
-              <a:t>2020-09-16</a:t>
+              <a:t>2025-06-02</a:t>
             </a:fld>
             <a:endParaRPr lang="en-US"/>
           </a:p>
@@ -4841,7 +4841,7 @@
           <a:p>
             <a:fld id="{1AD12F8B-7E05-A047-BAC3-EE71BEBBE5BE}" type="datetime1">
               <a:rPr lang="en-CA" smtClean="0"/>
-              <a:t>2020-09-16</a:t>
+              <a:t>2025-06-02</a:t>
             </a:fld>
             <a:endParaRPr lang="en-US"/>
           </a:p>
@@ -5129,7 +5129,7 @@
           <a:p>
             <a:fld id="{C1D9F72A-E93E-B546-8268-6408A6E1DA62}" type="datetime1">
               <a:rPr lang="en-CA" smtClean="0"/>
-              <a:t>2020-09-16</a:t>
+              <a:t>2025-06-02</a:t>
             </a:fld>
             <a:endParaRPr lang="en-US"/>
           </a:p>
@@ -5370,7 +5370,7 @@
           <a:p>
             <a:fld id="{97DF4AC7-DB73-7444-A2A7-FD79FE1A2B2B}" type="datetime1">
               <a:rPr lang="en-CA" smtClean="0"/>
-              <a:t>2020-09-16</a:t>
+              <a:t>2025-06-02</a:t>
             </a:fld>
             <a:endParaRPr lang="en-US"/>
           </a:p>
@@ -15373,6 +15373,132 @@
           </a:p>
         </p:txBody>
       </p:sp>
+      <p:sp>
+        <p:nvSpPr>
+          <p:cNvPr id="4" name="TextBox 3">
+            <a:extLst>
+              <a:ext uri="{FF2B5EF4-FFF2-40B4-BE49-F238E27FC236}">
+                <a16:creationId xmlns:a16="http://schemas.microsoft.com/office/drawing/2014/main" id="{9116385C-8007-6D9D-38BC-3631224900A3}"/>
+              </a:ext>
+            </a:extLst>
+          </p:cNvPr>
+          <p:cNvSpPr txBox="1"/>
+          <p:nvPr/>
+        </p:nvSpPr>
+        <p:spPr>
+          <a:xfrm>
+            <a:off x="1216550" y="1386333"/>
+            <a:ext cx="864339" cy="276999"/>
+          </a:xfrm>
+          <a:prstGeom prst="rect">
+            <a:avLst/>
+          </a:prstGeom>
+          <a:noFill/>
+        </p:spPr>
+        <p:txBody>
+          <a:bodyPr wrap="none" rtlCol="0">
+            <a:spAutoFit/>
+          </a:bodyPr>
+          <a:lstStyle/>
+          <a:p>
+            <a:r>
+              <a:rPr lang="en-US" sz="1200" dirty="0">
+                <a:solidFill>
+                  <a:srgbClr val="0070C0"/>
+                </a:solidFill>
+                <a:latin typeface="Consolas" panose="020B0609020204030204" pitchFamily="49" charset="0"/>
+                <a:cs typeface="Consolas" panose="020B0609020204030204" pitchFamily="49" charset="0"/>
+              </a:rPr>
+              <a:t>{digit}+</a:t>
+            </a:r>
+            <a:endParaRPr lang="en-US" sz="1200" dirty="0"/>
+          </a:p>
+        </p:txBody>
+      </p:sp>
+      <p:sp>
+        <p:nvSpPr>
+          <p:cNvPr id="5" name="TextBox 4">
+            <a:extLst>
+              <a:ext uri="{FF2B5EF4-FFF2-40B4-BE49-F238E27FC236}">
+                <a16:creationId xmlns:a16="http://schemas.microsoft.com/office/drawing/2014/main" id="{B672DA81-E749-8FB2-FC8C-3EDF9351438E}"/>
+              </a:ext>
+            </a:extLst>
+          </p:cNvPr>
+          <p:cNvSpPr txBox="1"/>
+          <p:nvPr/>
+        </p:nvSpPr>
+        <p:spPr>
+          <a:xfrm>
+            <a:off x="1262511" y="1851043"/>
+            <a:ext cx="692245" cy="276999"/>
+          </a:xfrm>
+          <a:prstGeom prst="rect">
+            <a:avLst/>
+          </a:prstGeom>
+          <a:noFill/>
+        </p:spPr>
+        <p:txBody>
+          <a:bodyPr wrap="square" rtlCol="0">
+            <a:spAutoFit/>
+          </a:bodyPr>
+          <a:lstStyle/>
+          <a:p>
+            <a:r>
+              <a:rPr lang="en-US" sz="1200" dirty="0">
+                <a:solidFill>
+                  <a:srgbClr val="0070C0"/>
+                </a:solidFill>
+                <a:latin typeface="Consolas" panose="020B0609020204030204" pitchFamily="49" charset="0"/>
+                <a:cs typeface="Consolas" panose="020B0609020204030204" pitchFamily="49" charset="0"/>
+              </a:rPr>
+              <a:t>double</a:t>
+            </a:r>
+            <a:endParaRPr lang="en-US" sz="1200" dirty="0"/>
+          </a:p>
+        </p:txBody>
+      </p:sp>
+      <p:sp>
+        <p:nvSpPr>
+          <p:cNvPr id="13" name="TextBox 12">
+            <a:extLst>
+              <a:ext uri="{FF2B5EF4-FFF2-40B4-BE49-F238E27FC236}">
+                <a16:creationId xmlns:a16="http://schemas.microsoft.com/office/drawing/2014/main" id="{76F5D1E9-1BB3-A627-A467-5A2AAEDC0E17}"/>
+              </a:ext>
+            </a:extLst>
+          </p:cNvPr>
+          <p:cNvSpPr txBox="1"/>
+          <p:nvPr/>
+        </p:nvSpPr>
+        <p:spPr>
+          <a:xfrm>
+            <a:off x="-22732" y="2306636"/>
+            <a:ext cx="2478564" cy="276999"/>
+          </a:xfrm>
+          <a:prstGeom prst="rect">
+            <a:avLst/>
+          </a:prstGeom>
+          <a:noFill/>
+        </p:spPr>
+        <p:txBody>
+          <a:bodyPr wrap="none" rtlCol="0">
+            <a:spAutoFit/>
+          </a:bodyPr>
+          <a:lstStyle/>
+          <a:p>
+            <a:r>
+              <a:rPr lang="en-US" sz="1200" dirty="0">
+                <a:solidFill>
+                  <a:srgbClr val="0070C0"/>
+                </a:solidFill>
+                <a:latin typeface="Consolas" panose="020B0609020204030204" pitchFamily="49" charset="0"/>
+                <a:cs typeface="Consolas" panose="020B0609020204030204" pitchFamily="49" charset="0"/>
+              </a:rPr>
+              <a:t>{letter}({letter}|{digit})+</a:t>
+            </a:r>
+            <a:endParaRPr lang="en-US" sz="1200" dirty="0"/>
+          </a:p>
+        </p:txBody>
+      </p:sp>
     </p:spTree>
     <p:extLst>
       <p:ext uri="{BB962C8B-B14F-4D97-AF65-F5344CB8AC3E}">
